--- a/2026_06_文化中国大赛/output/作品_初稿.pptx
+++ b/2026_06_文化中国大赛/output/作品_初稿.pptx
@@ -509,7 +509,7 @@
           <a:lstStyle/>
           <a:p>
             <a:r>
-              <a:t>一部书，如何走过一千四百年，走进寻常人家——这是《颜氏家训》的生命史。</a:t>
+              <a:t>一部书，如何走过一千四百年，走进寻常人家？这就是《颜氏家训》的生命史。我们关心的，不只是它写了什么，更是它如何被一代代人抄写、刊刻、引用，沉淀进日常。这次我们用数字人文方法追踪它——既见物，也见人。</a:t>
             </a:r>
           </a:p>
         </p:txBody>
@@ -579,7 +579,7 @@
           <a:lstStyle/>
           <a:p>
             <a:r>
-              <a:t>颜之推，生于南北朝乱世，历经四朝。他写这部家训，不是为了名垂青史，而是为了教子保家。中国第一部体系化家训，就这样在战火中诞生了。</a:t>
+              <a:t>先说缘起。颜之推生于南北朝乱世，写这部家训，只为教子保家；它被视为中国第一部体系完备的家训。我们选它，是因为它有一个张力：一部写给自家子弟的书，后来却被无数毫无血缘的家庭奉为圭臬。由此引出核心追问——教化智慧如何融入日常？</a:t>
             </a:r>
           </a:p>
         </p:txBody>
@@ -649,7 +649,7 @@
           <a:lstStyle/>
           <a:p>
             <a:r>
-              <a:t>从手抄本到雕版刻本，再到明清坊刻普及本，书越印越便宜，越传越广。每一次技术变革，都让这部书离普通人更近一步。</a:t>
+              <a:t>这张时间轴整理出版本流变，七个节点：成书抄本、唐代官方著录、宋代雕版、明代坊刻普及本、清代族谱引用、民国排印，直到当代数字化。它和印刷技术的进步同步：抄本稀少，只在士族间流传；到明代坊刻已亲民到能进家塾。每一次媒介变革，都把门槛降低一截。</a:t>
             </a:r>
           </a:p>
         </p:txBody>
@@ -719,7 +719,7 @@
           <a:lstStyle/>
           <a:p>
             <a:r>
-              <a:t>最初只在士族家学中流传，后来进入蒙学教材，被族谱家规引用，最终融入民间婚丧嫁娶、年节礼仪——这就是“大传统”走向“小传统”的路径。</a:t>
+              <a:t>这一页讲人群。传播路径是四层倒金字塔：最上是士族家学，靠手抄家传；往下是蒙学读物，与《三字经》《弟子规》并列为家塾教材；再往下是族谱家规；最底层是民间日用——理念化进婚丧嫁娶、年节礼仪。这正是“大传统”走向“小传统”的路径。</a:t>
             </a:r>
           </a:p>
         </p:txBody>
@@ -789,7 +789,7 @@
           <a:lstStyle/>
           <a:p>
             <a:r>
-              <a:t>我们用数字人文的方法，提取了全书的主题词——治家、教子、勉学、慕贤——这些关键词，就是这部书教给中国人的生活智慧。</a:t>
+              <a:t>这一页拉近到文本。词云用 TF-IDF 方法对样本做字与字组加权，权重越高字号越大。“教”“学”“风化”“慎”这类教化词被推到前面，“教妇初来、教儿婴孩”讲早教的字组也清晰可辨——可见这部书强调的始终是怎样教、怎样学。需说明：此为演示样本，严谨结论待补原文重算。</a:t>
             </a:r>
           </a:p>
         </p:txBody>
@@ -859,7 +859,7 @@
           <a:lstStyle/>
           <a:p>
             <a:r>
-              <a:t>《颜氏家训》不是孤立的。从《温公家范》到《朱子家训》再到《弟子规》，一条家训的脉络清晰可见。这就是知识传承的网络。</a:t>
+              <a:t>一部书的生命，也在它与别的书的关系里。这张互文网络用相似检索，以《颜氏家训》为核心，连向宋代的《温公家范》《袁氏世范》《三字经》与清代的《朱子家训》《弟子规》。强度同为方法演示，精确数值待补原文比对——但形状已经提示：典籍是在彼此引用中被记住的。</a:t>
             </a:r>
           </a:p>
         </p:txBody>
@@ -929,7 +929,7 @@
           <a:lstStyle/>
           <a:p>
             <a:r>
-              <a:t>今天，家风家教被重新提起，古籍数字化让千年典籍触手可及。典籍中的智慧，依然在回答当代人的生活问题。</a:t>
+              <a:t>这样一部古书，对今天有什么意义？一是家风家教被重新提起，人们重新关心该把什么价值传给下一代——这正是《颜氏家训》始终在回答的问题。二是古籍数字化：时间轴、传播路径、互文网络，都依赖典籍被结构化为可计算的数据。典籍的智慧并未过时，只是换了更易接近的方式。</a:t>
             </a:r>
           </a:p>
         </p:txBody>
@@ -999,7 +999,7 @@
           <a:lstStyle/>
           <a:p>
             <a:r>
-              <a:t>见物，更见人。一部书的生命史，就是无数普通人日常生活的精神史。</a:t>
+              <a:t>最后回到开头那句——见物，更见人。我们追踪一部书的版本、传播与互文，表面是在看物；真正浮现的，却是无数普通人如何借这部书教孩子、立家规、过日子。一部书的生命史，归根结底就是无数普通人日常生活的精神史。谢谢。</a:t>
             </a:r>
           </a:p>
         </p:txBody>

--- a/2026_06_文化中国大赛/output/作品_初稿.pptx
+++ b/2026_06_文化中国大赛/output/作品_初稿.pptx
@@ -789,7 +789,7 @@
           <a:lstStyle/>
           <a:p>
             <a:r>
-              <a:t>这一页拉近到文本。词云用 TF-IDF 方法对样本做字与字组加权，权重越高字号越大。“教”“学”“风化”“慎”这类教化词被推到前面，“教妇初来、教儿婴孩”讲早教的字组也清晰可辨——可见这部书强调的始终是怎样教、怎样学。需说明：此为演示样本，严谨结论待补原文重算。</a:t>
+              <a:t>这一页拉近到文本。词云用 TF-IDF 方法对样本做字与字组加权，权重越高字号越大。“学”“教”“书”这类核心字与“求益”这样的字组被推到前面——可见这部书强调的始终是怎样教、怎样学、为何读书。需说明：此为演示样本，词频结论随原文补全会变，严谨结论待补全本重算。</a:t>
             </a:r>
           </a:p>
         </p:txBody>
@@ -5148,7 +5148,7 @@
                 <a:latin typeface="Heiti SC"/>
                 <a:ea typeface="Heiti SC"/>
               </a:rPr>
-              <a:t>·  治家、教子、勉学、慕贤——高频教化关键词浮现。</a:t>
+              <a:t>·  学、教、书、求益、读——高频教化关键词浮现。</a:t>
             </a:r>
           </a:p>
           <a:p>

--- a/2026_06_文化中国大赛/output/作品_初稿.pptx
+++ b/2026_06_文化中国大赛/output/作品_初稿.pptx
@@ -4682,8 +4682,8 @@
         </p:blipFill>
         <p:spPr>
           <a:xfrm>
-            <a:off x="5029200" y="2307946"/>
-            <a:ext cx="6766559" cy="3247948"/>
+            <a:off x="5029200" y="2312694"/>
+            <a:ext cx="6766559" cy="3238451"/>
           </a:xfrm>
           <a:prstGeom prst="rect">
             <a:avLst/>
@@ -4934,8 +4934,8 @@
         </p:blipFill>
         <p:spPr>
           <a:xfrm>
-            <a:off x="5029200" y="1672616"/>
-            <a:ext cx="6766560" cy="4518608"/>
+            <a:off x="5029200" y="1683969"/>
+            <a:ext cx="6766560" cy="4495902"/>
           </a:xfrm>
           <a:prstGeom prst="rect">
             <a:avLst/>
@@ -5186,8 +5186,8 @@
         </p:blipFill>
         <p:spPr>
           <a:xfrm>
-            <a:off x="5029200" y="1883328"/>
-            <a:ext cx="6766560" cy="4097183"/>
+            <a:off x="5029200" y="1885915"/>
+            <a:ext cx="6766560" cy="4092009"/>
           </a:xfrm>
           <a:prstGeom prst="rect">
             <a:avLst/>
@@ -5438,8 +5438,8 @@
         </p:blipFill>
         <p:spPr>
           <a:xfrm>
-            <a:off x="6611505" y="1371600"/>
-            <a:ext cx="3601949" cy="5120640"/>
+            <a:off x="6616857" y="1371600"/>
+            <a:ext cx="3591245" cy="5120640"/>
           </a:xfrm>
           <a:prstGeom prst="rect">
             <a:avLst/>

--- a/2026_06_文化中国大赛/output/作品_初稿.pptx
+++ b/2026_06_文化中国大赛/output/作品_初稿.pptx
@@ -4682,8 +4682,8 @@
         </p:blipFill>
         <p:spPr>
           <a:xfrm>
-            <a:off x="5029200" y="2312694"/>
-            <a:ext cx="6766559" cy="3238451"/>
+            <a:off x="5029200" y="2303197"/>
+            <a:ext cx="6766559" cy="3257445"/>
           </a:xfrm>
           <a:prstGeom prst="rect">
             <a:avLst/>
@@ -4934,8 +4934,8 @@
         </p:blipFill>
         <p:spPr>
           <a:xfrm>
-            <a:off x="5029200" y="1683969"/>
-            <a:ext cx="6766560" cy="4495902"/>
+            <a:off x="5029200" y="1669777"/>
+            <a:ext cx="6766560" cy="4524285"/>
           </a:xfrm>
           <a:prstGeom prst="rect">
             <a:avLst/>
@@ -5186,8 +5186,8 @@
         </p:blipFill>
         <p:spPr>
           <a:xfrm>
-            <a:off x="5029200" y="1885915"/>
-            <a:ext cx="6766560" cy="4092009"/>
+            <a:off x="5029200" y="1880742"/>
+            <a:ext cx="6766560" cy="4102356"/>
           </a:xfrm>
           <a:prstGeom prst="rect">
             <a:avLst/>
@@ -5438,8 +5438,8 @@
         </p:blipFill>
         <p:spPr>
           <a:xfrm>
-            <a:off x="6616857" y="1371600"/>
-            <a:ext cx="3591245" cy="5120640"/>
+            <a:off x="6626734" y="1371600"/>
+            <a:ext cx="3571491" cy="5120640"/>
           </a:xfrm>
           <a:prstGeom prst="rect">
             <a:avLst/>
